--- a/Slides/unit_9_prog_6.pptx
+++ b/Slides/unit_9_prog_6.pptx
@@ -298,18 +298,26 @@
       </p15:sldGuideLst>
     </p:ext>
     <p:ext uri="http://customooxmlschemas.google.com/">
-      <go:slidesCustomData xmlns:go="http://customooxmlschemas.google.com/" xmlns:ahyp="http://schemas.microsoft.com/office/drawing/2018/hyperlinkcolor" xmlns:p15="http://schemas.microsoft.com/office/powerpoint/2012/main" xmlns:p14="http://schemas.microsoft.com/office/powerpoint/2010/main" xmlns:com="http://schemas.openxmlformats.org/drawingml/2006/compatibility" xmlns:pvml="urn:schemas-microsoft-com:office:powerpoint" xmlns:v="urn:schemas-microsoft-com:vml" xmlns:o="urn:schemas-microsoft-com:office:office" xmlns:dgm="http://schemas.openxmlformats.org/drawingml/2006/diagram" xmlns:c="http://schemas.openxmlformats.org/drawingml/2006/chart" xmlns:mv="urn:schemas-microsoft-com:mac:vml" xmlns:mc="http://schemas.openxmlformats.org/markup-compatibility/2006" xmlns="" r:id="rId80" roundtripDataSignature="AMtx7milieXwv5OUJdQk1cj/252aZuXcIQ=="/>
+      <go:slidesCustomData xmlns="" xmlns:mc="http://schemas.openxmlformats.org/markup-compatibility/2006" xmlns:mv="urn:schemas-microsoft-com:mac:vml" xmlns:c="http://schemas.openxmlformats.org/drawingml/2006/chart" xmlns:dgm="http://schemas.openxmlformats.org/drawingml/2006/diagram" xmlns:o="urn:schemas-microsoft-com:office:office" xmlns:v="urn:schemas-microsoft-com:vml" xmlns:pvml="urn:schemas-microsoft-com:office:powerpoint" xmlns:com="http://schemas.openxmlformats.org/drawingml/2006/compatibility" xmlns:p14="http://schemas.microsoft.com/office/powerpoint/2010/main" xmlns:p15="http://schemas.microsoft.com/office/powerpoint/2012/main" xmlns:ahyp="http://schemas.microsoft.com/office/drawing/2018/hyperlinkcolor" xmlns:go="http://customooxmlschemas.google.com/" r:id="rId80" roundtripDataSignature="AMtx7milieXwv5OUJdQk1cj/252aZuXcIQ=="/>
     </p:ext>
   </p:extLst>
 </p:presentation>
+</file>
+
+<file path=ppt/revisionInfo.xml><?xml version="1.0" encoding="utf-8"?>
+<p1510:revInfo xmlns:a="http://schemas.openxmlformats.org/drawingml/2006/main" xmlns:r="http://schemas.openxmlformats.org/officeDocument/2006/relationships" xmlns:p1510="http://schemas.microsoft.com/office/powerpoint/2015/10/main">
+  <p1510:revLst>
+    <p1510:client id="{325A55CC-7538-5A48-B65E-6F40BAE7BFB1}" v="51" dt="2025-11-27T12:28:26.325"/>
+  </p1510:revLst>
+</p1510:revInfo>
 </file>
 
 <file path=ppt/changesInfos/changesInfo1.xml><?xml version="1.0" encoding="utf-8"?>
 <pc:chgInfo xmlns:a="http://schemas.openxmlformats.org/drawingml/2006/main" xmlns:r="http://schemas.openxmlformats.org/officeDocument/2006/relationships" xmlns:ac="http://schemas.microsoft.com/office/drawing/2013/main/command" xmlns:pc="http://schemas.microsoft.com/office/powerpoint/2013/main/command">
   <pc:docChgLst>
     <pc:chgData name="Ingo Frommholz" userId="ee3b4549-206f-4e4f-93a1-b7ff676f0af7" providerId="ADAL" clId="{5F8971C4-3D52-5FAB-A951-9912A46CDBB0}"/>
-    <pc:docChg chg="modSld">
-      <pc:chgData name="Ingo Frommholz" userId="ee3b4549-206f-4e4f-93a1-b7ff676f0af7" providerId="ADAL" clId="{5F8971C4-3D52-5FAB-A951-9912A46CDBB0}" dt="2025-11-22T20:43:02.175" v="2" actId="20577"/>
+    <pc:docChg chg="custSel modSld">
+      <pc:chgData name="Ingo Frommholz" userId="ee3b4549-206f-4e4f-93a1-b7ff676f0af7" providerId="ADAL" clId="{5F8971C4-3D52-5FAB-A951-9912A46CDBB0}" dt="2025-11-27T15:10:21.451" v="152" actId="20577"/>
       <pc:docMkLst>
         <pc:docMk/>
       </pc:docMkLst>
@@ -325,6 +333,36 @@
             <pc:docMk/>
             <pc:sldMk cId="0" sldId="256"/>
             <ac:spMk id="80" creationId="{00000000-0000-0000-0000-000000000000}"/>
+          </ac:spMkLst>
+        </pc:spChg>
+      </pc:sldChg>
+      <pc:sldChg chg="modSp modAnim">
+        <pc:chgData name="Ingo Frommholz" userId="ee3b4549-206f-4e4f-93a1-b7ff676f0af7" providerId="ADAL" clId="{5F8971C4-3D52-5FAB-A951-9912A46CDBB0}" dt="2025-11-27T12:28:26.324" v="53" actId="20577"/>
+        <pc:sldMkLst>
+          <pc:docMk/>
+          <pc:sldMk cId="4043078330" sldId="576"/>
+        </pc:sldMkLst>
+        <pc:spChg chg="mod">
+          <ac:chgData name="Ingo Frommholz" userId="ee3b4549-206f-4e4f-93a1-b7ff676f0af7" providerId="ADAL" clId="{5F8971C4-3D52-5FAB-A951-9912A46CDBB0}" dt="2025-11-27T12:28:26.324" v="53" actId="20577"/>
+          <ac:spMkLst>
+            <pc:docMk/>
+            <pc:sldMk cId="4043078330" sldId="576"/>
+            <ac:spMk id="26" creationId="{7C6601B5-28BE-43C1-8565-7FE07576EC06}"/>
+          </ac:spMkLst>
+        </pc:spChg>
+      </pc:sldChg>
+      <pc:sldChg chg="modSp mod">
+        <pc:chgData name="Ingo Frommholz" userId="ee3b4549-206f-4e4f-93a1-b7ff676f0af7" providerId="ADAL" clId="{5F8971C4-3D52-5FAB-A951-9912A46CDBB0}" dt="2025-11-27T15:10:21.451" v="152" actId="20577"/>
+        <pc:sldMkLst>
+          <pc:docMk/>
+          <pc:sldMk cId="1166150988" sldId="587"/>
+        </pc:sldMkLst>
+        <pc:spChg chg="mod">
+          <ac:chgData name="Ingo Frommholz" userId="ee3b4549-206f-4e4f-93a1-b7ff676f0af7" providerId="ADAL" clId="{5F8971C4-3D52-5FAB-A951-9912A46CDBB0}" dt="2025-11-27T15:10:21.451" v="152" actId="20577"/>
+          <ac:spMkLst>
+            <pc:docMk/>
+            <pc:sldMk cId="1166150988" sldId="587"/>
+            <ac:spMk id="5" creationId="{7561D9C6-C93E-47CC-B7AC-0FDA433001FA}"/>
           </ac:spMkLst>
         </pc:spChg>
       </pc:sldChg>
@@ -6446,7 +6484,7 @@
         </p:blipFill>
         <p:spPr>
           <a:xfrm>
-            <a:off x="22" y="19050"/>
+            <a:off x="0" y="0"/>
             <a:ext cx="9144000" cy="6858046"/>
           </a:xfrm>
           <a:prstGeom prst="rect">
@@ -12741,18 +12779,9 @@
                 <a:latin typeface="Calibri" panose="020F0502020204030204" pitchFamily="34" charset="0"/>
                 <a:ea typeface="Calibri" panose="020F0502020204030204" pitchFamily="34" charset="0"/>
                 <a:cs typeface="Calibri" panose="020F0502020204030204" pitchFamily="34" charset="0"/>
-                <a:hlinkClick r:id="rId3"/>
-              </a:rPr>
-              <a:t>Notebook examples</a:t>
-            </a:r>
-            <a:endParaRPr lang="en-US" sz="1800" spc="-1" dirty="0">
-              <a:solidFill>
-                <a:srgbClr val="0F0F0F"/>
-              </a:solidFill>
-              <a:latin typeface="Calibri" panose="020F0502020204030204" pitchFamily="34" charset="0"/>
-              <a:ea typeface="Calibri" panose="020F0502020204030204" pitchFamily="34" charset="0"/>
-              <a:cs typeface="Calibri" panose="020F0502020204030204" pitchFamily="34" charset="0"/>
-            </a:endParaRPr>
+              </a:rPr>
+              <a:t>See Unit 9 Python Notebook</a:t>
+            </a:r>
           </a:p>
         </p:txBody>
       </p:sp>
@@ -22108,7 +22137,7 @@
         <p:spPr>
           <a:xfrm>
             <a:off x="604683" y="2336012"/>
-            <a:ext cx="7973310" cy="1514470"/>
+            <a:ext cx="7973310" cy="3239840"/>
           </a:xfrm>
           <a:prstGeom prst="rect">
             <a:avLst/>
@@ -22390,6 +22419,100 @@
                 <a:cs typeface="Consolas" panose="020B0609020204030204" pitchFamily="49" charset="0"/>
               </a:rPr>
               <a:t>)</a:t>
+            </a:r>
+          </a:p>
+          <a:p>
+            <a:pPr marL="114300" indent="0">
+              <a:buNone/>
+            </a:pPr>
+            <a:endParaRPr lang="en-GB" sz="1600" dirty="0">
+              <a:latin typeface="Consolas" panose="020B0609020204030204" pitchFamily="49" charset="0"/>
+              <a:cs typeface="Consolas" panose="020B0609020204030204" pitchFamily="49" charset="0"/>
+            </a:endParaRPr>
+          </a:p>
+          <a:p>
+            <a:pPr marL="114300" indent="0">
+              <a:buNone/>
+            </a:pPr>
+            <a:endParaRPr lang="en-GB" sz="1600" dirty="0">
+              <a:latin typeface="Consolas" panose="020B0609020204030204" pitchFamily="49" charset="0"/>
+              <a:cs typeface="Consolas" panose="020B0609020204030204" pitchFamily="49" charset="0"/>
+            </a:endParaRPr>
+          </a:p>
+          <a:p>
+            <a:pPr marL="114300" indent="0">
+              <a:buNone/>
+            </a:pPr>
+            <a:r>
+              <a:rPr lang="en-GB" sz="1600" dirty="0">
+                <a:latin typeface="Consolas" panose="020B0609020204030204" pitchFamily="49" charset="0"/>
+                <a:cs typeface="Consolas" panose="020B0609020204030204" pitchFamily="49" charset="0"/>
+              </a:rPr>
+              <a:t>try:</a:t>
+            </a:r>
+          </a:p>
+          <a:p>
+            <a:pPr marL="114300" indent="0">
+              <a:buNone/>
+            </a:pPr>
+            <a:r>
+              <a:rPr lang="en-GB" sz="1600" dirty="0">
+                <a:latin typeface="Consolas" panose="020B0609020204030204" pitchFamily="49" charset="0"/>
+                <a:cs typeface="Consolas" panose="020B0609020204030204" pitchFamily="49" charset="0"/>
+              </a:rPr>
+              <a:t>	</a:t>
+            </a:r>
+            <a:r>
+              <a:rPr lang="en-GB" sz="1600" dirty="0" err="1">
+                <a:latin typeface="Consolas" panose="020B0609020204030204" pitchFamily="49" charset="0"/>
+                <a:cs typeface="Consolas" panose="020B0609020204030204" pitchFamily="49" charset="0"/>
+              </a:rPr>
+              <a:t>my_function</a:t>
+            </a:r>
+            <a:r>
+              <a:rPr lang="en-GB" sz="1600" dirty="0">
+                <a:latin typeface="Consolas" panose="020B0609020204030204" pitchFamily="49" charset="0"/>
+                <a:cs typeface="Consolas" panose="020B0609020204030204" pitchFamily="49" charset="0"/>
+              </a:rPr>
+              <a:t>(“Ingo”)</a:t>
+            </a:r>
+          </a:p>
+          <a:p>
+            <a:pPr marL="114300" indent="0">
+              <a:buNone/>
+            </a:pPr>
+            <a:r>
+              <a:rPr lang="en-GB" sz="1600" dirty="0">
+                <a:latin typeface="Consolas" panose="020B0609020204030204" pitchFamily="49" charset="0"/>
+                <a:cs typeface="Consolas" panose="020B0609020204030204" pitchFamily="49" charset="0"/>
+              </a:rPr>
+              <a:t>Exception </a:t>
+            </a:r>
+            <a:r>
+              <a:rPr lang="en-GB" sz="1600" dirty="0" err="1">
+                <a:latin typeface="Consolas" panose="020B0609020204030204" pitchFamily="49" charset="0"/>
+                <a:cs typeface="Consolas" panose="020B0609020204030204" pitchFamily="49" charset="0"/>
+              </a:rPr>
+              <a:t>TypeError</a:t>
+            </a:r>
+            <a:r>
+              <a:rPr lang="en-GB" sz="1600" dirty="0">
+                <a:latin typeface="Consolas" panose="020B0609020204030204" pitchFamily="49" charset="0"/>
+                <a:cs typeface="Consolas" panose="020B0609020204030204" pitchFamily="49" charset="0"/>
+              </a:rPr>
+              <a:t>:</a:t>
+            </a:r>
+          </a:p>
+          <a:p>
+            <a:pPr marL="114300" indent="0">
+              <a:buNone/>
+            </a:pPr>
+            <a:r>
+              <a:rPr lang="en-GB" sz="1600" dirty="0">
+                <a:latin typeface="Consolas" panose="020B0609020204030204" pitchFamily="49" charset="0"/>
+                <a:cs typeface="Consolas" panose="020B0609020204030204" pitchFamily="49" charset="0"/>
+              </a:rPr>
+              <a:t>	print(“Oops!”)</a:t>
             </a:r>
           </a:p>
         </p:txBody>
